--- a/lect_Transfer_Learning.pptx
+++ b/lect_Transfer_Learning.pptx
@@ -5,10 +5,11 @@
     <p:sldMasterId id="2147483659" r:id="rId1"/>
   </p:sldMasterIdLst>
   <p:notesMasterIdLst>
-    <p:notesMasterId r:id="rId3"/>
+    <p:notesMasterId r:id="rId4"/>
   </p:notesMasterIdLst>
   <p:sldIdLst>
-    <p:sldId id="333" r:id="rId2"/>
+    <p:sldId id="256" r:id="rId2"/>
+    <p:sldId id="333" r:id="rId3"/>
   </p:sldIdLst>
   <p:sldSz cx="12192000" cy="6858000"/>
   <p:notesSz cx="6858000" cy="9144000"/>
@@ -1440,6 +1441,156 @@
     </a:lvl9pPr>
   </p:notesStyle>
 </p:notesMaster>
+</file>
+
+<file path=ppt/notesSlides/notesSlide1.xml><?xml version="1.0" encoding="utf-8"?>
+<p:notes xmlns:a="http://schemas.openxmlformats.org/drawingml/2006/main" xmlns:r="http://schemas.openxmlformats.org/officeDocument/2006/relationships" xmlns:p="http://schemas.openxmlformats.org/presentationml/2006/main" showMasterSp="0" showMasterPhAnim="0">
+  <p:cSld>
+    <p:spTree>
+      <p:nvGrpSpPr>
+        <p:cNvPr id="1" name="Shape 84"/>
+        <p:cNvGrpSpPr/>
+        <p:nvPr/>
+      </p:nvGrpSpPr>
+      <p:grpSpPr>
+        <a:xfrm>
+          <a:off x="0" y="0"/>
+          <a:ext cx="0" cy="0"/>
+          <a:chOff x="0" y="0"/>
+          <a:chExt cx="0" cy="0"/>
+        </a:xfrm>
+      </p:grpSpPr>
+      <p:sp>
+        <p:nvSpPr>
+          <p:cNvPr id="85" name="Google Shape;85;g46667a5bec_0_0:notes"/>
+          <p:cNvSpPr>
+            <a:spLocks noGrp="1" noRot="1" noChangeAspect="1"/>
+          </p:cNvSpPr>
+          <p:nvPr>
+            <p:ph type="sldImg" idx="2"/>
+          </p:nvPr>
+        </p:nvSpPr>
+        <p:spPr>
+          <a:xfrm>
+            <a:off x="685800" y="1143000"/>
+            <a:ext cx="5486400" cy="3086100"/>
+          </a:xfrm>
+          <a:custGeom>
+            <a:avLst/>
+            <a:gdLst/>
+            <a:ahLst/>
+            <a:cxnLst/>
+            <a:rect l="l" t="t" r="r" b="b"/>
+            <a:pathLst>
+              <a:path w="120000" h="120000" extrusionOk="0">
+                <a:moveTo>
+                  <a:pt x="0" y="0"/>
+                </a:moveTo>
+                <a:lnTo>
+                  <a:pt x="120000" y="0"/>
+                </a:lnTo>
+                <a:lnTo>
+                  <a:pt x="120000" y="120000"/>
+                </a:lnTo>
+                <a:lnTo>
+                  <a:pt x="0" y="120000"/>
+                </a:lnTo>
+                <a:close/>
+              </a:path>
+            </a:pathLst>
+          </a:custGeom>
+        </p:spPr>
+      </p:sp>
+      <p:sp>
+        <p:nvSpPr>
+          <p:cNvPr id="86" name="Google Shape;86;g46667a5bec_0_0:notes"/>
+          <p:cNvSpPr txBox="1">
+            <a:spLocks noGrp="1"/>
+          </p:cNvSpPr>
+          <p:nvPr>
+            <p:ph type="body" idx="1"/>
+          </p:nvPr>
+        </p:nvSpPr>
+        <p:spPr>
+          <a:xfrm>
+            <a:off x="685800" y="4400550"/>
+            <a:ext cx="5486400" cy="3600600"/>
+          </a:xfrm>
+          <a:prstGeom prst="rect">
+            <a:avLst/>
+          </a:prstGeom>
+        </p:spPr>
+        <p:txBody>
+          <a:bodyPr spcFirstLastPara="1" wrap="square" lIns="91425" tIns="91425" rIns="91425" bIns="91425" anchor="t" anchorCtr="0">
+            <a:noAutofit/>
+          </a:bodyPr>
+          <a:lstStyle/>
+          <a:p>
+            <a:pPr marL="0" lvl="0" indent="0" algn="l" rtl="0">
+              <a:spcBef>
+                <a:spcPts val="0"/>
+              </a:spcBef>
+              <a:spcAft>
+                <a:spcPts val="0"/>
+              </a:spcAft>
+              <a:buNone/>
+            </a:pPr>
+            <a:endParaRPr/>
+          </a:p>
+        </p:txBody>
+      </p:sp>
+      <p:sp>
+        <p:nvSpPr>
+          <p:cNvPr id="87" name="Google Shape;87;g46667a5bec_0_0:notes"/>
+          <p:cNvSpPr txBox="1">
+            <a:spLocks noGrp="1"/>
+          </p:cNvSpPr>
+          <p:nvPr>
+            <p:ph type="sldNum" idx="12"/>
+          </p:nvPr>
+        </p:nvSpPr>
+        <p:spPr>
+          <a:xfrm>
+            <a:off x="3884613" y="8685213"/>
+            <a:ext cx="2971800" cy="458700"/>
+          </a:xfrm>
+          <a:prstGeom prst="rect">
+            <a:avLst/>
+          </a:prstGeom>
+        </p:spPr>
+        <p:txBody>
+          <a:bodyPr spcFirstLastPara="1" wrap="square" lIns="91425" tIns="45700" rIns="91425" bIns="45700" anchor="b" anchorCtr="0">
+            <a:noAutofit/>
+          </a:bodyPr>
+          <a:lstStyle/>
+          <a:p>
+            <a:pPr marL="0" lvl="0" indent="0" algn="r" rtl="0">
+              <a:spcBef>
+                <a:spcPts val="0"/>
+              </a:spcBef>
+              <a:spcAft>
+                <a:spcPts val="0"/>
+              </a:spcAft>
+              <a:buClr>
+                <a:srgbClr val="000000"/>
+              </a:buClr>
+              <a:buFont typeface="Arial"/>
+              <a:buNone/>
+            </a:pPr>
+            <a:fld id="{00000000-1234-1234-1234-123412341234}" type="slidenum">
+              <a:rPr lang="en-US"/>
+              <a:t>1</a:t>
+            </a:fld>
+            <a:endParaRPr/>
+          </a:p>
+        </p:txBody>
+      </p:sp>
+    </p:spTree>
+  </p:cSld>
+  <p:clrMapOvr>
+    <a:masterClrMapping/>
+  </p:clrMapOvr>
+</p:notes>
 </file>
 
 <file path=ppt/slideLayouts/slideLayout1.xml><?xml version="1.0" encoding="utf-8"?>
@@ -13140,6 +13291,287 @@
   <p:cSld>
     <p:spTree>
       <p:nvGrpSpPr>
+        <p:cNvPr id="1" name="Shape 88"/>
+        <p:cNvGrpSpPr/>
+        <p:nvPr/>
+      </p:nvGrpSpPr>
+      <p:grpSpPr>
+        <a:xfrm>
+          <a:off x="0" y="0"/>
+          <a:ext cx="0" cy="0"/>
+          <a:chOff x="0" y="0"/>
+          <a:chExt cx="0" cy="0"/>
+        </a:xfrm>
+      </p:grpSpPr>
+      <p:sp>
+        <p:nvSpPr>
+          <p:cNvPr id="89" name="Google Shape;89;p13"/>
+          <p:cNvSpPr txBox="1"/>
+          <p:nvPr/>
+        </p:nvSpPr>
+        <p:spPr>
+          <a:xfrm>
+            <a:off x="0" y="0"/>
+            <a:ext cx="3987384" cy="831300"/>
+          </a:xfrm>
+          <a:prstGeom prst="rect">
+            <a:avLst/>
+          </a:prstGeom>
+          <a:noFill/>
+          <a:ln>
+            <a:noFill/>
+          </a:ln>
+        </p:spPr>
+        <p:txBody>
+          <a:bodyPr spcFirstLastPara="1" wrap="square" lIns="91425" tIns="91425" rIns="91425" bIns="91425" anchor="t" anchorCtr="0">
+            <a:noAutofit/>
+          </a:bodyPr>
+          <a:lstStyle/>
+          <a:p>
+            <a:pPr marL="0" lvl="0" indent="0" algn="l" rtl="0">
+              <a:spcBef>
+                <a:spcPts val="0"/>
+              </a:spcBef>
+              <a:spcAft>
+                <a:spcPts val="0"/>
+              </a:spcAft>
+              <a:buNone/>
+            </a:pPr>
+            <a:r>
+              <a:rPr lang="en-US" sz="3000" b="1" dirty="0"/>
+              <a:t>Transfer Learning</a:t>
+            </a:r>
+            <a:endParaRPr sz="3000" b="1" dirty="0"/>
+          </a:p>
+        </p:txBody>
+      </p:sp>
+      <p:sp>
+        <p:nvSpPr>
+          <p:cNvPr id="90" name="Google Shape;90;p13"/>
+          <p:cNvSpPr txBox="1"/>
+          <p:nvPr/>
+        </p:nvSpPr>
+        <p:spPr>
+          <a:xfrm>
+            <a:off x="0" y="935700"/>
+            <a:ext cx="11891100" cy="1350300"/>
+          </a:xfrm>
+          <a:prstGeom prst="rect">
+            <a:avLst/>
+          </a:prstGeom>
+          <a:noFill/>
+          <a:ln>
+            <a:noFill/>
+          </a:ln>
+        </p:spPr>
+        <p:txBody>
+          <a:bodyPr spcFirstLastPara="1" wrap="square" lIns="91425" tIns="91425" rIns="91425" bIns="91425" anchor="t" anchorCtr="0">
+            <a:noAutofit/>
+          </a:bodyPr>
+          <a:lstStyle/>
+          <a:p>
+            <a:pPr marL="0" lvl="0" indent="0" algn="l" rtl="0">
+              <a:spcBef>
+                <a:spcPts val="0"/>
+              </a:spcBef>
+              <a:spcAft>
+                <a:spcPts val="0"/>
+              </a:spcAft>
+              <a:buNone/>
+            </a:pPr>
+            <a:r>
+              <a:rPr lang="en-US" sz="1800" dirty="0"/>
+              <a:t>Solve one problem, use gained knowledge to solve a different but related problem. </a:t>
+            </a:r>
+            <a:endParaRPr sz="1800" dirty="0"/>
+          </a:p>
+          <a:p>
+            <a:pPr marL="0" lvl="0" indent="0" algn="l" rtl="0">
+              <a:spcBef>
+                <a:spcPts val="0"/>
+              </a:spcBef>
+              <a:spcAft>
+                <a:spcPts val="0"/>
+              </a:spcAft>
+              <a:buNone/>
+            </a:pPr>
+            <a:r>
+              <a:rPr lang="en-US" sz="1800" dirty="0"/>
+              <a:t>Ex. : Train a CNN to recognize cars. Then use first pre-trained layers of this CNN to effectively train new CNN to recognize trucks - using very small dataset of trucks. If objects a similar in nature, we can freeze these first layers, and only train the output fully-connected layers of the CNN. Which makes training much faster and easier.</a:t>
+            </a:r>
+            <a:endParaRPr sz="3000" dirty="0"/>
+          </a:p>
+        </p:txBody>
+      </p:sp>
+      <p:pic>
+        <p:nvPicPr>
+          <p:cNvPr id="91" name="Google Shape;91;p13"/>
+          <p:cNvPicPr preferRelativeResize="0"/>
+          <p:nvPr/>
+        </p:nvPicPr>
+        <p:blipFill>
+          <a:blip r:embed="rId3" cstate="email">
+            <a:alphaModFix/>
+            <a:extLst>
+              <a:ext uri="{28A0092B-C50C-407E-A947-70E740481C1C}">
+                <a14:useLocalDpi xmlns:a14="http://schemas.microsoft.com/office/drawing/2010/main"/>
+              </a:ext>
+            </a:extLst>
+          </a:blip>
+          <a:stretch>
+            <a:fillRect/>
+          </a:stretch>
+        </p:blipFill>
+        <p:spPr>
+          <a:xfrm>
+            <a:off x="6858000" y="3243900"/>
+            <a:ext cx="5240850" cy="3614100"/>
+          </a:xfrm>
+          <a:prstGeom prst="rect">
+            <a:avLst/>
+          </a:prstGeom>
+          <a:noFill/>
+          <a:ln>
+            <a:noFill/>
+          </a:ln>
+        </p:spPr>
+      </p:pic>
+      <p:pic>
+        <p:nvPicPr>
+          <p:cNvPr id="92" name="Google Shape;92;p13"/>
+          <p:cNvPicPr preferRelativeResize="0"/>
+          <p:nvPr/>
+        </p:nvPicPr>
+        <p:blipFill>
+          <a:blip r:embed="rId4" cstate="email">
+            <a:alphaModFix/>
+            <a:extLst>
+              <a:ext uri="{28A0092B-C50C-407E-A947-70E740481C1C}">
+                <a14:useLocalDpi xmlns:a14="http://schemas.microsoft.com/office/drawing/2010/main"/>
+              </a:ext>
+            </a:extLst>
+          </a:blip>
+          <a:stretch>
+            <a:fillRect/>
+          </a:stretch>
+        </p:blipFill>
+        <p:spPr>
+          <a:xfrm>
+            <a:off x="0" y="2285991"/>
+            <a:ext cx="6858000" cy="4572010"/>
+          </a:xfrm>
+          <a:prstGeom prst="rect">
+            <a:avLst/>
+          </a:prstGeom>
+          <a:noFill/>
+          <a:ln>
+            <a:noFill/>
+          </a:ln>
+        </p:spPr>
+      </p:pic>
+      <p:sp>
+        <p:nvSpPr>
+          <p:cNvPr id="93" name="Google Shape;93;p13"/>
+          <p:cNvSpPr txBox="1"/>
+          <p:nvPr/>
+        </p:nvSpPr>
+        <p:spPr>
+          <a:xfrm>
+            <a:off x="3987384" y="26675"/>
+            <a:ext cx="8187791" cy="831300"/>
+          </a:xfrm>
+          <a:prstGeom prst="rect">
+            <a:avLst/>
+          </a:prstGeom>
+          <a:noFill/>
+          <a:ln>
+            <a:noFill/>
+          </a:ln>
+        </p:spPr>
+        <p:txBody>
+          <a:bodyPr spcFirstLastPara="1" wrap="square" lIns="91425" tIns="91425" rIns="91425" bIns="91425" anchor="t" anchorCtr="0">
+            <a:noAutofit/>
+          </a:bodyPr>
+          <a:lstStyle/>
+          <a:p>
+            <a:pPr marL="0" lvl="0" indent="0" algn="l" rtl="0">
+              <a:spcBef>
+                <a:spcPts val="0"/>
+              </a:spcBef>
+              <a:spcAft>
+                <a:spcPts val="0"/>
+              </a:spcAft>
+              <a:buNone/>
+            </a:pPr>
+            <a:r>
+              <a:rPr lang="en-US" sz="2400" b="1" i="1" dirty="0">
+                <a:solidFill>
+                  <a:srgbClr val="0000FF"/>
+                </a:solidFill>
+              </a:rPr>
+              <a:t>Transfer Learning is the key to general intelligence</a:t>
+            </a:r>
+            <a:endParaRPr sz="2400" b="1" i="1" dirty="0">
+              <a:solidFill>
+                <a:srgbClr val="0000FF"/>
+              </a:solidFill>
+            </a:endParaRPr>
+          </a:p>
+          <a:p>
+            <a:pPr marL="0" lvl="0" indent="0" algn="l" rtl="0">
+              <a:spcBef>
+                <a:spcPts val="0"/>
+              </a:spcBef>
+              <a:spcAft>
+                <a:spcPts val="0"/>
+              </a:spcAft>
+              <a:buNone/>
+            </a:pPr>
+            <a:r>
+              <a:rPr lang="en-US" sz="2400" b="1" i="1" dirty="0">
+                <a:solidFill>
+                  <a:srgbClr val="0000FF"/>
+                </a:solidFill>
+              </a:rPr>
+              <a:t>      - </a:t>
+            </a:r>
+            <a:r>
+              <a:rPr lang="en-US" sz="2400" b="1" i="1" dirty="0" err="1">
+                <a:solidFill>
+                  <a:srgbClr val="0000FF"/>
+                </a:solidFill>
+              </a:rPr>
+              <a:t>Demis</a:t>
+            </a:r>
+            <a:r>
+              <a:rPr lang="en-US" sz="2400" b="1" i="1" dirty="0">
+                <a:solidFill>
+                  <a:srgbClr val="0000FF"/>
+                </a:solidFill>
+              </a:rPr>
+              <a:t> Hassabis</a:t>
+            </a:r>
+            <a:endParaRPr sz="2400" b="1" i="1" dirty="0">
+              <a:solidFill>
+                <a:srgbClr val="0000FF"/>
+              </a:solidFill>
+            </a:endParaRPr>
+          </a:p>
+        </p:txBody>
+      </p:sp>
+    </p:spTree>
+  </p:cSld>
+  <p:clrMapOvr>
+    <a:masterClrMapping/>
+  </p:clrMapOvr>
+</p:sld>
+</file>
+
+<file path=ppt/slides/slide2.xml><?xml version="1.0" encoding="utf-8"?>
+<p:sld xmlns:a="http://schemas.openxmlformats.org/drawingml/2006/main" xmlns:r="http://schemas.openxmlformats.org/officeDocument/2006/relationships" xmlns:p="http://schemas.openxmlformats.org/presentationml/2006/main">
+  <p:cSld>
+    <p:spTree>
+      <p:nvGrpSpPr>
         <p:cNvPr id="1" name=""/>
         <p:cNvGrpSpPr/>
         <p:nvPr/>
@@ -13249,10 +13681,10 @@
           <p:nvPr/>
         </p:nvPicPr>
         <p:blipFill>
-          <a:blip r:embed="rId2">
+          <a:blip r:embed="rId2" cstate="email">
             <a:extLst>
               <a:ext uri="{28A0092B-C50C-407E-A947-70E740481C1C}">
-                <a14:useLocalDpi xmlns:a14="http://schemas.microsoft.com/office/drawing/2010/main" val="0"/>
+                <a14:useLocalDpi xmlns:a14="http://schemas.microsoft.com/office/drawing/2010/main"/>
               </a:ext>
             </a:extLst>
           </a:blip>
